--- a/rivr-tech-business-plan/RIVR_Tech_Five_Year_Executive_Presentation_2027-2031.pptx
+++ b/rivr-tech-business-plan/RIVR_Tech_Five_Year_Executive_Presentation_2027-2031.pptx
@@ -178,19 +178,19 @@
                 <c:formatCode>General</c:formatCode>
                 <c:ptCount val="5"/>
                 <c:pt idx="0">
-                  <c:v>6661077</c:v>
+                  <c:v>5115204</c:v>
                 </c:pt>
                 <c:pt idx="1">
-                  <c:v>8553884</c:v>
+                  <c:v>6564951</c:v>
                 </c:pt>
                 <c:pt idx="2">
-                  <c:v>10615017</c:v>
+                  <c:v>8132975</c:v>
                 </c:pt>
                 <c:pt idx="3">
-                  <c:v>12556905</c:v>
+                  <c:v>9604573</c:v>
                 </c:pt>
                 <c:pt idx="4">
-                  <c:v>14218396</c:v>
+                  <c:v>10862324</c:v>
                 </c:pt>
               </c:numCache>
             </c:numRef>
@@ -921,19 +921,19 @@
                 <c:formatCode>General</c:formatCode>
                 <c:ptCount val="5"/>
                 <c:pt idx="0">
-                  <c:v>903646</c:v>
+                  <c:v>264394</c:v>
                 </c:pt>
                 <c:pt idx="1">
-                  <c:v>1649463</c:v>
+                  <c:v>884347</c:v>
                 </c:pt>
                 <c:pt idx="2">
-                  <c:v>2509361</c:v>
+                  <c:v>1555169</c:v>
                 </c:pt>
                 <c:pt idx="3">
-                  <c:v>3366565</c:v>
+                  <c:v>2183587</c:v>
                 </c:pt>
                 <c:pt idx="4">
-                  <c:v>3927209</c:v>
+                  <c:v>2649820</c:v>
                 </c:pt>
               </c:numCache>
             </c:numRef>
@@ -4736,7 +4736,7 @@
                           </a:solidFill>
                           <a:latin typeface="Calibri"/>
                         </a:rPr>
-                        <a:t>$42.0M</a:t>
+                        <a:t>$32.6M</a:t>
                       </a:r>
                     </a:p>
                   </a:txBody>
@@ -4759,7 +4759,7 @@
                           </a:solidFill>
                           <a:latin typeface="Calibri"/>
                         </a:rPr>
-                        <a:t>$52.6M</a:t>
+                        <a:t>$40.3M</a:t>
                       </a:r>
                     </a:p>
                   </a:txBody>
@@ -4782,7 +4782,7 @@
                           </a:solidFill>
                           <a:latin typeface="Calibri"/>
                         </a:rPr>
-                        <a:t>$64.4M</a:t>
+                        <a:t>$50.6M</a:t>
                       </a:r>
                     </a:p>
                   </a:txBody>
@@ -4830,7 +4830,7 @@
                           </a:solidFill>
                           <a:latin typeface="Calibri"/>
                         </a:rPr>
-                        <a:t>$3.5M</a:t>
+                        <a:t>$0.7M</a:t>
                       </a:r>
                     </a:p>
                   </a:txBody>
@@ -4853,7 +4853,7 @@
                           </a:solidFill>
                           <a:latin typeface="Calibri"/>
                         </a:rPr>
-                        <a:t>$12.4M</a:t>
+                        <a:t>$7.5M</a:t>
                       </a:r>
                     </a:p>
                   </a:txBody>
@@ -4876,7 +4876,7 @@
                           </a:solidFill>
                           <a:latin typeface="Calibri"/>
                         </a:rPr>
-                        <a:t>$19.7M</a:t>
+                        <a:t>$14.7M</a:t>
                       </a:r>
                     </a:p>
                   </a:txBody>
@@ -4924,7 +4924,7 @@
                           </a:solidFill>
                           <a:latin typeface="Calibri"/>
                         </a:rPr>
-                        <a:t>8%</a:t>
+                        <a:t>4%</a:t>
                       </a:r>
                     </a:p>
                   </a:txBody>
@@ -4947,7 +4947,7 @@
                           </a:solidFill>
                           <a:latin typeface="Calibri"/>
                         </a:rPr>
-                        <a:t>28%</a:t>
+                        <a:t>24%</a:t>
                       </a:r>
                     </a:p>
                   </a:txBody>
@@ -4970,7 +4970,7 @@
                           </a:solidFill>
                           <a:latin typeface="Calibri"/>
                         </a:rPr>
-                        <a:t>38%</a:t>
+                        <a:t>36%</a:t>
                       </a:r>
                     </a:p>
                   </a:txBody>
@@ -7407,7 +7407,7 @@
                 </a:solidFill>
                 <a:latin typeface="Calibri"/>
               </a:rPr>
-              <a:t>Minimum to justify the investment: ≈9,700+ subscribers and ≥$12M revenue by 2031, 2031 EBITDA margin ≥22%.</a:t>
+              <a:t>Minimum to justify the investment: ≈9,711 subscribers and ≥$9.2M revenue by 2031, with 2031 EBITDA margin ≥20%.</a:t>
             </a:r>
           </a:p>
         </p:txBody>
@@ -7653,7 +7653,7 @@
                 </a:solidFill>
                 <a:latin typeface="Calibri"/>
               </a:rPr>
-              <a:t>$14.2M revenue · 28% EBITDA margin · 11,425 subscribers by 2031</a:t>
+              <a:t>$10.9M revenue · 24% EBITDA margin · 11,425 subscribers by 2031</a:t>
             </a:r>
           </a:p>
         </p:txBody>
@@ -8205,7 +8205,7 @@
                 </a:solidFill>
                 <a:latin typeface="Calibri"/>
               </a:rPr>
-              <a:t>$14.2M</a:t>
+              <a:t>$10.9M</a:t>
             </a:r>
           </a:p>
         </p:txBody>
@@ -8521,7 +8521,7 @@
                 </a:solidFill>
                 <a:latin typeface="Calibri"/>
               </a:rPr>
-              <a:t>28%</a:t>
+              <a:t>24%</a:t>
             </a:r>
           </a:p>
         </p:txBody>
@@ -9206,7 +9206,7 @@
                 </a:solidFill>
                 <a:latin typeface="Calibri"/>
               </a:rPr>
-              <a:t>Residential ARPU</a:t>
+              <a:t>Res broadband ARPU</a:t>
             </a:r>
           </a:p>
         </p:txBody>
@@ -9241,7 +9241,7 @@
                 </a:solidFill>
                 <a:latin typeface="Calibri"/>
               </a:rPr>
-              <a:t>$74</a:t>
+              <a:t>$66</a:t>
             </a:r>
           </a:p>
         </p:txBody>
@@ -9364,7 +9364,7 @@
                 </a:solidFill>
                 <a:latin typeface="Calibri"/>
               </a:rPr>
-              <a:t>Business ARPU</a:t>
+              <a:t>Biz broadband ARPU</a:t>
             </a:r>
           </a:p>
         </p:txBody>
@@ -9399,7 +9399,7 @@
                 </a:solidFill>
                 <a:latin typeface="Calibri"/>
               </a:rPr>
-              <a:t>$149</a:t>
+              <a:t>$110</a:t>
             </a:r>
           </a:p>
         </p:txBody>
@@ -9522,7 +9522,7 @@
                 </a:solidFill>
                 <a:latin typeface="Calibri"/>
               </a:rPr>
-              <a:t>Filled positions</a:t>
+              <a:t>Op. revenue (annualized)</a:t>
             </a:r>
           </a:p>
         </p:txBody>
@@ -9553,11 +9553,11 @@
             <a:r>
               <a:rPr sz="2600" b="1" i="0">
                 <a:solidFill>
-                  <a:srgbClr val="1F3B4D"/>
-                </a:solidFill>
-                <a:latin typeface="Calibri"/>
-              </a:rPr>
-              <a:t>15</a:t>
+                  <a:srgbClr val="2E7D8A"/>
+                </a:solidFill>
+                <a:latin typeface="Calibri"/>
+              </a:rPr>
+              <a:t>$4.1M</a:t>
             </a:r>
           </a:p>
         </p:txBody>
@@ -9680,7 +9680,7 @@
                 </a:solidFill>
                 <a:latin typeface="Calibri"/>
               </a:rPr>
-              <a:t>Open positions</a:t>
+              <a:t>EBITDA (annualized)</a:t>
             </a:r>
           </a:p>
         </p:txBody>
@@ -9715,7 +9715,7 @@
                 </a:solidFill>
                 <a:latin typeface="Calibri"/>
               </a:rPr>
-              <a:t>3</a:t>
+              <a:t>-$0.14M</a:t>
             </a:r>
           </a:p>
         </p:txBody>
@@ -9838,7 +9838,7 @@
                 </a:solidFill>
                 <a:latin typeface="Calibri"/>
               </a:rPr>
-              <a:t>Authorized positions</a:t>
+              <a:t>Grant awards</a:t>
             </a:r>
           </a:p>
         </p:txBody>
@@ -9869,11 +9869,11 @@
             <a:r>
               <a:rPr sz="2600" b="1" i="0">
                 <a:solidFill>
-                  <a:srgbClr val="1F3B4D"/>
-                </a:solidFill>
-                <a:latin typeface="Calibri"/>
-              </a:rPr>
-              <a:t>18</a:t>
+                  <a:srgbClr val="2E7D5A"/>
+                </a:solidFill>
+                <a:latin typeface="Calibri"/>
+              </a:rPr>
+              <a:t>$11.6M</a:t>
             </a:r>
           </a:p>
         </p:txBody>
@@ -9996,7 +9996,7 @@
                 </a:solidFill>
                 <a:latin typeface="Calibri"/>
               </a:rPr>
-              <a:t>Counties served</a:t>
+              <a:t>Authorized staff</a:t>
             </a:r>
           </a:p>
         </p:txBody>
@@ -10027,11 +10027,11 @@
             <a:r>
               <a:rPr sz="2600" b="1" i="0">
                 <a:solidFill>
-                  <a:srgbClr val="2E7D8A"/>
-                </a:solidFill>
-                <a:latin typeface="Calibri"/>
-              </a:rPr>
-              <a:t>4 +</a:t>
+                  <a:srgbClr val="1F3B4D"/>
+                </a:solidFill>
+                <a:latin typeface="Calibri"/>
+              </a:rPr>
+              <a:t>18</a:t>
             </a:r>
           </a:p>
         </p:txBody>
@@ -10045,7 +10045,7 @@
         <p:spPr>
           <a:xfrm>
             <a:off x="548640" y="4434840"/>
-            <a:ext cx="10972800" cy="1645920"/>
+            <a:ext cx="10972800" cy="1737360"/>
           </a:xfrm>
           <a:prstGeom prst="rect">
             <a:avLst/>
@@ -10060,13 +10060,13 @@
           <a:p>
             <a:pPr algn="l"/>
             <a:r>
-              <a:rPr sz="1300" b="0" i="1">
+              <a:rPr sz="1250" b="0" i="1">
                 <a:solidFill>
                   <a:srgbClr val="606060"/>
                 </a:solidFill>
                 <a:latin typeface="Calibri"/>
               </a:rPr>
-              <a:t>Supplied figures are treated as management-provided and unaudited. RIVR Tech source files were not available; all projections rest on these inputs plus clearly-labeled assumptions and placeholders. Product-line subscriber splits, ARPU detail, passings, and labor rates are the top placeholders to replace with actuals.</a:t>
+              <a:t>Based on actual Q2-2026 results (BOD deck): ~$4.1M annualized operating revenue, roughly EBITDA break-even (slight operating loss), net-income-positive on ~$1.1M/yr grant income, and ~$0.46M/yr interest on existing debt. $11.6M of construction grants awarded (CAB 2.0, NC Stop GAP, BTAP). Subscriber splits, ARPU detail, and labor rates remain partly estimated.</a:t>
             </a:r>
           </a:p>
         </p:txBody>
@@ -10576,7 +10576,7 @@
                 </a:solidFill>
                 <a:latin typeface="Calibri"/>
               </a:rPr>
-              <a:t>$6.7M→$14.2M</a:t>
+              <a:t>$5.1M→$10.9M</a:t>
             </a:r>
           </a:p>
         </p:txBody>
@@ -10734,7 +10734,7 @@
                 </a:solidFill>
                 <a:latin typeface="Calibri"/>
               </a:rPr>
-              <a:t>14%→28%</a:t>
+              <a:t>5%→24%</a:t>
             </a:r>
           </a:p>
         </p:txBody>
@@ -13030,7 +13030,7 @@
                 </a:solidFill>
                 <a:latin typeface="Calibri"/>
               </a:rPr>
-              <a:t>▸ Fill 3 vacancies first — </a:t>
+              <a:t>▸ Today: 15 filled · 3 open · 18 authorized — </a:t>
             </a:r>
             <a:r>
               <a:rPr sz="1400">
@@ -13039,7 +13039,7 @@
                 </a:solidFill>
                 <a:latin typeface="Calibri"/>
               </a:rPr>
-              <a:t>1 sales rep + 2 fiber technicians in Year 1.</a:t>
+              <a:t>fill the 3 vacancies (1 sales rep + 2 fiber technicians) in Year 1.</a:t>
             </a:r>
           </a:p>
           <a:p>
@@ -13441,7 +13441,7 @@
                 <a:gridCol w="1219200"/>
                 <a:gridCol w="1219200"/>
               </a:tblGrid>
-              <a:tr h="548640">
+              <a:tr h="470262">
                 <a:tc>
                   <a:txBody>
                     <a:bodyPr/>
@@ -13572,7 +13572,7 @@
                   </a:tcPr>
                 </a:tc>
               </a:tr>
-              <a:tr h="548640">
+              <a:tr h="470262">
                 <a:tc>
                   <a:txBody>
                     <a:bodyPr/>
@@ -13609,7 +13609,7 @@
                           </a:solidFill>
                           <a:latin typeface="Calibri"/>
                         </a:rPr>
-                        <a:t>$6.7M</a:t>
+                        <a:t>$5.1M</a:t>
                       </a:r>
                     </a:p>
                   </a:txBody>
@@ -13632,7 +13632,7 @@
                           </a:solidFill>
                           <a:latin typeface="Calibri"/>
                         </a:rPr>
-                        <a:t>$8.6M</a:t>
+                        <a:t>$6.6M</a:t>
                       </a:r>
                     </a:p>
                   </a:txBody>
@@ -13655,7 +13655,7 @@
                           </a:solidFill>
                           <a:latin typeface="Calibri"/>
                         </a:rPr>
-                        <a:t>$10.6M</a:t>
+                        <a:t>$8.1M</a:t>
                       </a:r>
                     </a:p>
                   </a:txBody>
@@ -13678,7 +13678,7 @@
                           </a:solidFill>
                           <a:latin typeface="Calibri"/>
                         </a:rPr>
-                        <a:t>$12.6M</a:t>
+                        <a:t>$9.6M</a:t>
                       </a:r>
                     </a:p>
                   </a:txBody>
@@ -13701,7 +13701,7 @@
                           </a:solidFill>
                           <a:latin typeface="Calibri"/>
                         </a:rPr>
-                        <a:t>$14.2M</a:t>
+                        <a:t>$10.9M</a:t>
                       </a:r>
                     </a:p>
                   </a:txBody>
@@ -13712,7 +13712,7 @@
                   </a:tcPr>
                 </a:tc>
               </a:tr>
-              <a:tr h="548640">
+              <a:tr h="470262">
                 <a:tc>
                   <a:txBody>
                     <a:bodyPr/>
@@ -13749,7 +13749,7 @@
                           </a:solidFill>
                           <a:latin typeface="Calibri"/>
                         </a:rPr>
-                        <a:t>$5.8M</a:t>
+                        <a:t>$4.9M</a:t>
                       </a:r>
                     </a:p>
                   </a:txBody>
@@ -13772,7 +13772,7 @@
                           </a:solidFill>
                           <a:latin typeface="Calibri"/>
                         </a:rPr>
-                        <a:t>$6.9M</a:t>
+                        <a:t>$5.7M</a:t>
                       </a:r>
                     </a:p>
                   </a:txBody>
@@ -13795,7 +13795,7 @@
                           </a:solidFill>
                           <a:latin typeface="Calibri"/>
                         </a:rPr>
-                        <a:t>$8.1M</a:t>
+                        <a:t>$6.6M</a:t>
                       </a:r>
                     </a:p>
                   </a:txBody>
@@ -13818,7 +13818,7 @@
                           </a:solidFill>
                           <a:latin typeface="Calibri"/>
                         </a:rPr>
-                        <a:t>$9.2M</a:t>
+                        <a:t>$7.4M</a:t>
                       </a:r>
                     </a:p>
                   </a:txBody>
@@ -13841,7 +13841,7 @@
                           </a:solidFill>
                           <a:latin typeface="Calibri"/>
                         </a:rPr>
-                        <a:t>$10.3M</a:t>
+                        <a:t>$8.2M</a:t>
                       </a:r>
                     </a:p>
                   </a:txBody>
@@ -13852,7 +13852,7 @@
                   </a:tcPr>
                 </a:tc>
               </a:tr>
-              <a:tr h="548640">
+              <a:tr h="470262">
                 <a:tc>
                   <a:txBody>
                     <a:bodyPr/>
@@ -13867,6 +13867,29 @@
                           <a:latin typeface="Calibri"/>
                         </a:rPr>
                         <a:t>EBITDA</a:t>
+                      </a:r>
+                    </a:p>
+                  </a:txBody>
+                  <a:tcPr>
+                    <a:solidFill>
+                      <a:srgbClr val="FFFFFF"/>
+                    </a:solidFill>
+                  </a:tcPr>
+                </a:tc>
+                <a:tc>
+                  <a:txBody>
+                    <a:bodyPr/>
+                    <a:lstStyle/>
+                    <a:p>
+                      <a:pPr algn="r"/>
+                      <a:r>
+                        <a:rPr sz="1100">
+                          <a:solidFill>
+                            <a:srgbClr val="1F3B4D"/>
+                          </a:solidFill>
+                          <a:latin typeface="Calibri"/>
+                        </a:rPr>
+                        <a:t>$0.3M</a:t>
                       </a:r>
                     </a:p>
                   </a:txBody>
@@ -13935,7 +13958,7 @@
                           </a:solidFill>
                           <a:latin typeface="Calibri"/>
                         </a:rPr>
-                        <a:t>$2.5M</a:t>
+                        <a:t>$2.2M</a:t>
                       </a:r>
                     </a:p>
                   </a:txBody>
@@ -13958,7 +13981,172 @@
                           </a:solidFill>
                           <a:latin typeface="Calibri"/>
                         </a:rPr>
-                        <a:t>$3.4M</a:t>
+                        <a:t>$2.6M</a:t>
+                      </a:r>
+                    </a:p>
+                  </a:txBody>
+                  <a:tcPr>
+                    <a:solidFill>
+                      <a:srgbClr val="FFFFFF"/>
+                    </a:solidFill>
+                  </a:tcPr>
+                </a:tc>
+              </a:tr>
+              <a:tr h="470262">
+                <a:tc>
+                  <a:txBody>
+                    <a:bodyPr/>
+                    <a:lstStyle/>
+                    <a:p>
+                      <a:pPr algn="l"/>
+                      <a:r>
+                        <a:rPr sz="1100">
+                          <a:solidFill>
+                            <a:srgbClr val="1F3B4D"/>
+                          </a:solidFill>
+                          <a:latin typeface="Calibri"/>
+                        </a:rPr>
+                        <a:t>Net income (loss)</a:t>
+                      </a:r>
+                    </a:p>
+                  </a:txBody>
+                  <a:tcPr>
+                    <a:solidFill>
+                      <a:srgbClr val="F2F6FA"/>
+                    </a:solidFill>
+                  </a:tcPr>
+                </a:tc>
+                <a:tc>
+                  <a:txBody>
+                    <a:bodyPr/>
+                    <a:lstStyle/>
+                    <a:p>
+                      <a:pPr algn="r"/>
+                      <a:r>
+                        <a:rPr sz="1100">
+                          <a:solidFill>
+                            <a:srgbClr val="1F3B4D"/>
+                          </a:solidFill>
+                          <a:latin typeface="Calibri"/>
+                        </a:rPr>
+                        <a:t>$0.1M</a:t>
+                      </a:r>
+                    </a:p>
+                  </a:txBody>
+                  <a:tcPr>
+                    <a:solidFill>
+                      <a:srgbClr val="F2F6FA"/>
+                    </a:solidFill>
+                  </a:tcPr>
+                </a:tc>
+                <a:tc>
+                  <a:txBody>
+                    <a:bodyPr/>
+                    <a:lstStyle/>
+                    <a:p>
+                      <a:pPr algn="r"/>
+                      <a:r>
+                        <a:rPr sz="1100">
+                          <a:solidFill>
+                            <a:srgbClr val="1F3B4D"/>
+                          </a:solidFill>
+                          <a:latin typeface="Calibri"/>
+                        </a:rPr>
+                        <a:t>$-0.2M</a:t>
+                      </a:r>
+                    </a:p>
+                  </a:txBody>
+                  <a:tcPr>
+                    <a:solidFill>
+                      <a:srgbClr val="F2F6FA"/>
+                    </a:solidFill>
+                  </a:tcPr>
+                </a:tc>
+                <a:tc>
+                  <a:txBody>
+                    <a:bodyPr/>
+                    <a:lstStyle/>
+                    <a:p>
+                      <a:pPr algn="r"/>
+                      <a:r>
+                        <a:rPr sz="1100">
+                          <a:solidFill>
+                            <a:srgbClr val="1F3B4D"/>
+                          </a:solidFill>
+                          <a:latin typeface="Calibri"/>
+                        </a:rPr>
+                        <a:t>$-0.6M</a:t>
+                      </a:r>
+                    </a:p>
+                  </a:txBody>
+                  <a:tcPr>
+                    <a:solidFill>
+                      <a:srgbClr val="F2F6FA"/>
+                    </a:solidFill>
+                  </a:tcPr>
+                </a:tc>
+                <a:tc>
+                  <a:txBody>
+                    <a:bodyPr/>
+                    <a:lstStyle/>
+                    <a:p>
+                      <a:pPr algn="r"/>
+                      <a:r>
+                        <a:rPr sz="1100">
+                          <a:solidFill>
+                            <a:srgbClr val="1F3B4D"/>
+                          </a:solidFill>
+                          <a:latin typeface="Calibri"/>
+                        </a:rPr>
+                        <a:t>$-1.0M</a:t>
+                      </a:r>
+                    </a:p>
+                  </a:txBody>
+                  <a:tcPr>
+                    <a:solidFill>
+                      <a:srgbClr val="F2F6FA"/>
+                    </a:solidFill>
+                  </a:tcPr>
+                </a:tc>
+                <a:tc>
+                  <a:txBody>
+                    <a:bodyPr/>
+                    <a:lstStyle/>
+                    <a:p>
+                      <a:pPr algn="r"/>
+                      <a:r>
+                        <a:rPr sz="1100">
+                          <a:solidFill>
+                            <a:srgbClr val="1F3B4D"/>
+                          </a:solidFill>
+                          <a:latin typeface="Calibri"/>
+                        </a:rPr>
+                        <a:t>$-1.5M</a:t>
+                      </a:r>
+                    </a:p>
+                  </a:txBody>
+                  <a:tcPr>
+                    <a:solidFill>
+                      <a:srgbClr val="F2F6FA"/>
+                    </a:solidFill>
+                  </a:tcPr>
+                </a:tc>
+              </a:tr>
+              <a:tr h="470262">
+                <a:tc>
+                  <a:txBody>
+                    <a:bodyPr/>
+                    <a:lstStyle/>
+                    <a:p>
+                      <a:pPr algn="l"/>
+                      <a:r>
+                        <a:rPr sz="1100">
+                          <a:solidFill>
+                            <a:srgbClr val="1F3B4D"/>
+                          </a:solidFill>
+                          <a:latin typeface="Calibri"/>
+                        </a:rPr>
+                        <a:t>Capital expenditures</a:t>
                       </a:r>
                     </a:p>
                   </a:txBody>
@@ -13981,7 +14169,99 @@
                           </a:solidFill>
                           <a:latin typeface="Calibri"/>
                         </a:rPr>
-                        <a:t>$3.9M</a:t>
+                        <a:t>$9.6M</a:t>
+                      </a:r>
+                    </a:p>
+                  </a:txBody>
+                  <a:tcPr>
+                    <a:solidFill>
+                      <a:srgbClr val="FFFFFF"/>
+                    </a:solidFill>
+                  </a:tcPr>
+                </a:tc>
+                <a:tc>
+                  <a:txBody>
+                    <a:bodyPr/>
+                    <a:lstStyle/>
+                    <a:p>
+                      <a:pPr algn="r"/>
+                      <a:r>
+                        <a:rPr sz="1100">
+                          <a:solidFill>
+                            <a:srgbClr val="1F3B4D"/>
+                          </a:solidFill>
+                          <a:latin typeface="Calibri"/>
+                        </a:rPr>
+                        <a:t>$9.8M</a:t>
+                      </a:r>
+                    </a:p>
+                  </a:txBody>
+                  <a:tcPr>
+                    <a:solidFill>
+                      <a:srgbClr val="FFFFFF"/>
+                    </a:solidFill>
+                  </a:tcPr>
+                </a:tc>
+                <a:tc>
+                  <a:txBody>
+                    <a:bodyPr/>
+                    <a:lstStyle/>
+                    <a:p>
+                      <a:pPr algn="r"/>
+                      <a:r>
+                        <a:rPr sz="1100">
+                          <a:solidFill>
+                            <a:srgbClr val="1F3B4D"/>
+                          </a:solidFill>
+                          <a:latin typeface="Calibri"/>
+                        </a:rPr>
+                        <a:t>$10.0M</a:t>
+                      </a:r>
+                    </a:p>
+                  </a:txBody>
+                  <a:tcPr>
+                    <a:solidFill>
+                      <a:srgbClr val="FFFFFF"/>
+                    </a:solidFill>
+                  </a:tcPr>
+                </a:tc>
+                <a:tc>
+                  <a:txBody>
+                    <a:bodyPr/>
+                    <a:lstStyle/>
+                    <a:p>
+                      <a:pPr algn="r"/>
+                      <a:r>
+                        <a:rPr sz="1100">
+                          <a:solidFill>
+                            <a:srgbClr val="1F3B4D"/>
+                          </a:solidFill>
+                          <a:latin typeface="Calibri"/>
+                        </a:rPr>
+                        <a:t>$9.8M</a:t>
+                      </a:r>
+                    </a:p>
+                  </a:txBody>
+                  <a:tcPr>
+                    <a:solidFill>
+                      <a:srgbClr val="FFFFFF"/>
+                    </a:solidFill>
+                  </a:tcPr>
+                </a:tc>
+                <a:tc>
+                  <a:txBody>
+                    <a:bodyPr/>
+                    <a:lstStyle/>
+                    <a:p>
+                      <a:pPr algn="r"/>
+                      <a:r>
+                        <a:rPr sz="1100">
+                          <a:solidFill>
+                            <a:srgbClr val="1F3B4D"/>
+                          </a:solidFill>
+                          <a:latin typeface="Calibri"/>
+                        </a:rPr>
+                        <a:t>$9.7M</a:t>
                       </a:r>
                     </a:p>
                   </a:txBody>
@@ -13992,7 +14272,7 @@
                   </a:tcPr>
                 </a:tc>
               </a:tr>
-              <a:tr h="548640">
+              <a:tr h="470268">
                 <a:tc>
                   <a:txBody>
                     <a:bodyPr/>
@@ -14006,7 +14286,7 @@
                           </a:solidFill>
                           <a:latin typeface="Calibri"/>
                         </a:rPr>
-                        <a:t>Capital expenditures</a:t>
+                        <a:t>Free cash flow (pre-fin.)</a:t>
                       </a:r>
                     </a:p>
                   </a:txBody>
@@ -14029,7 +14309,7 @@
                           </a:solidFill>
                           <a:latin typeface="Calibri"/>
                         </a:rPr>
-                        <a:t>$9.6M</a:t>
+                        <a:t>$-9.8M</a:t>
                       </a:r>
                     </a:p>
                   </a:txBody>
@@ -14052,7 +14332,7 @@
                           </a:solidFill>
                           <a:latin typeface="Calibri"/>
                         </a:rPr>
-                        <a:t>$9.8M</a:t>
+                        <a:t>$-9.4M</a:t>
                       </a:r>
                     </a:p>
                   </a:txBody>
@@ -14075,7 +14355,7 @@
                           </a:solidFill>
                           <a:latin typeface="Calibri"/>
                         </a:rPr>
-                        <a:t>$10.0M</a:t>
+                        <a:t>$-8.9M</a:t>
                       </a:r>
                     </a:p>
                   </a:txBody>
@@ -14098,7 +14378,7 @@
                           </a:solidFill>
                           <a:latin typeface="Calibri"/>
                         </a:rPr>
-                        <a:t>$9.8M</a:t>
+                        <a:t>$-8.1M</a:t>
                       </a:r>
                     </a:p>
                   </a:txBody>
@@ -14121,7 +14401,7 @@
                           </a:solidFill>
                           <a:latin typeface="Calibri"/>
                         </a:rPr>
-                        <a:t>$9.7M</a:t>
+                        <a:t>$-7.5M</a:t>
                       </a:r>
                     </a:p>
                   </a:txBody>
@@ -14132,146 +14412,6 @@
                   </a:tcPr>
                 </a:tc>
               </a:tr>
-              <a:tr h="548640">
-                <a:tc>
-                  <a:txBody>
-                    <a:bodyPr/>
-                    <a:lstStyle/>
-                    <a:p>
-                      <a:pPr algn="l"/>
-                      <a:r>
-                        <a:rPr sz="1100">
-                          <a:solidFill>
-                            <a:srgbClr val="1F3B4D"/>
-                          </a:solidFill>
-                          <a:latin typeface="Calibri"/>
-                        </a:rPr>
-                        <a:t>Free cash flow (pre-fin.)</a:t>
-                      </a:r>
-                    </a:p>
-                  </a:txBody>
-                  <a:tcPr>
-                    <a:solidFill>
-                      <a:srgbClr val="FFFFFF"/>
-                    </a:solidFill>
-                  </a:tcPr>
-                </a:tc>
-                <a:tc>
-                  <a:txBody>
-                    <a:bodyPr/>
-                    <a:lstStyle/>
-                    <a:p>
-                      <a:pPr algn="r"/>
-                      <a:r>
-                        <a:rPr sz="1100">
-                          <a:solidFill>
-                            <a:srgbClr val="1F3B4D"/>
-                          </a:solidFill>
-                          <a:latin typeface="Calibri"/>
-                        </a:rPr>
-                        <a:t>$-8.7M</a:t>
-                      </a:r>
-                    </a:p>
-                  </a:txBody>
-                  <a:tcPr>
-                    <a:solidFill>
-                      <a:srgbClr val="FFFFFF"/>
-                    </a:solidFill>
-                  </a:tcPr>
-                </a:tc>
-                <a:tc>
-                  <a:txBody>
-                    <a:bodyPr/>
-                    <a:lstStyle/>
-                    <a:p>
-                      <a:pPr algn="r"/>
-                      <a:r>
-                        <a:rPr sz="1100">
-                          <a:solidFill>
-                            <a:srgbClr val="1F3B4D"/>
-                          </a:solidFill>
-                          <a:latin typeface="Calibri"/>
-                        </a:rPr>
-                        <a:t>$-8.2M</a:t>
-                      </a:r>
-                    </a:p>
-                  </a:txBody>
-                  <a:tcPr>
-                    <a:solidFill>
-                      <a:srgbClr val="FFFFFF"/>
-                    </a:solidFill>
-                  </a:tcPr>
-                </a:tc>
-                <a:tc>
-                  <a:txBody>
-                    <a:bodyPr/>
-                    <a:lstStyle/>
-                    <a:p>
-                      <a:pPr algn="r"/>
-                      <a:r>
-                        <a:rPr sz="1100">
-                          <a:solidFill>
-                            <a:srgbClr val="1F3B4D"/>
-                          </a:solidFill>
-                          <a:latin typeface="Calibri"/>
-                        </a:rPr>
-                        <a:t>$-7.5M</a:t>
-                      </a:r>
-                    </a:p>
-                  </a:txBody>
-                  <a:tcPr>
-                    <a:solidFill>
-                      <a:srgbClr val="FFFFFF"/>
-                    </a:solidFill>
-                  </a:tcPr>
-                </a:tc>
-                <a:tc>
-                  <a:txBody>
-                    <a:bodyPr/>
-                    <a:lstStyle/>
-                    <a:p>
-                      <a:pPr algn="r"/>
-                      <a:r>
-                        <a:rPr sz="1100">
-                          <a:solidFill>
-                            <a:srgbClr val="1F3B4D"/>
-                          </a:solidFill>
-                          <a:latin typeface="Calibri"/>
-                        </a:rPr>
-                        <a:t>$-6.4M</a:t>
-                      </a:r>
-                    </a:p>
-                  </a:txBody>
-                  <a:tcPr>
-                    <a:solidFill>
-                      <a:srgbClr val="FFFFFF"/>
-                    </a:solidFill>
-                  </a:tcPr>
-                </a:tc>
-                <a:tc>
-                  <a:txBody>
-                    <a:bodyPr/>
-                    <a:lstStyle/>
-                    <a:p>
-                      <a:pPr algn="r"/>
-                      <a:r>
-                        <a:rPr sz="1100">
-                          <a:solidFill>
-                            <a:srgbClr val="1F3B4D"/>
-                          </a:solidFill>
-                          <a:latin typeface="Calibri"/>
-                        </a:rPr>
-                        <a:t>$-5.8M</a:t>
-                      </a:r>
-                    </a:p>
-                  </a:txBody>
-                  <a:tcPr>
-                    <a:solidFill>
-                      <a:srgbClr val="FFFFFF"/>
-                    </a:solidFill>
-                  </a:tcPr>
-                </a:tc>
-              </a:tr>
             </a:tbl>
           </a:graphicData>
         </a:graphic>
@@ -14394,7 +14534,7 @@
                 </a:solidFill>
                 <a:latin typeface="Calibri"/>
               </a:rPr>
-              <a:t>EBITDA-positive</a:t>
+              <a:t>EBITDA</a:t>
             </a:r>
           </a:p>
         </p:txBody>
@@ -14429,7 +14569,7 @@
                 </a:solidFill>
                 <a:latin typeface="Calibri"/>
               </a:rPr>
-              <a:t>Every year</a:t>
+              <a:t>Turns positive 2027</a:t>
             </a:r>
           </a:p>
         </p:txBody>
@@ -14552,7 +14692,7 @@
                 </a:solidFill>
                 <a:latin typeface="Calibri"/>
               </a:rPr>
-              <a:t>Peak cash need</a:t>
+              <a:t>2031 EBITDA margin</a:t>
             </a:r>
           </a:p>
         </p:txBody>
@@ -14583,11 +14723,11 @@
             <a:r>
               <a:rPr sz="2600" b="1" i="0">
                 <a:solidFill>
-                  <a:srgbClr val="E18A2B"/>
-                </a:solidFill>
-                <a:latin typeface="Calibri"/>
-              </a:rPr>
-              <a:t>$-36.6M</a:t>
+                  <a:srgbClr val="2E7D8A"/>
+                </a:solidFill>
+                <a:latin typeface="Calibri"/>
+              </a:rPr>
+              <a:t>24%</a:t>
             </a:r>
           </a:p>
         </p:txBody>
@@ -14710,7 +14850,7 @@
                 </a:solidFill>
                 <a:latin typeface="Calibri"/>
               </a:rPr>
-              <a:t>Funding envelope</a:t>
+              <a:t>Grant awards</a:t>
             </a:r>
           </a:p>
         </p:txBody>
@@ -14741,11 +14881,11 @@
             <a:r>
               <a:rPr sz="2600" b="1" i="0">
                 <a:solidFill>
-                  <a:srgbClr val="2E7D8A"/>
-                </a:solidFill>
-                <a:latin typeface="Calibri"/>
-              </a:rPr>
-              <a:t>$50M (ample)</a:t>
+                  <a:srgbClr val="2E7D5A"/>
+                </a:solidFill>
+                <a:latin typeface="Calibri"/>
+              </a:rPr>
+              <a:t>$11.6M</a:t>
             </a:r>
           </a:p>
         </p:txBody>
@@ -14758,8 +14898,8 @@
         </p:nvSpPr>
         <p:spPr>
           <a:xfrm>
-            <a:off x="548640" y="4937760"/>
-            <a:ext cx="10972800" cy="1280160"/>
+            <a:off x="548640" y="4983480"/>
+            <a:ext cx="10972800" cy="1371600"/>
           </a:xfrm>
           <a:prstGeom prst="rect">
             <a:avLst/>
@@ -14774,13 +14914,13 @@
           <a:p>
             <a:pPr algn="l"/>
             <a:r>
-              <a:rPr sz="1300" b="0" i="1">
+              <a:rPr sz="1250" b="0" i="1">
                 <a:solidFill>
                   <a:srgbClr val="606060"/>
                 </a:solidFill>
                 <a:latin typeface="Calibri"/>
               </a:rPr>
-              <a:t>Break-even: EBITDA-positive from Year 1. Free cash flow is negative during the fiber build and is funded within the $50M capital program; FCF break-even follows beyond the plan horizon — the expected profile for an expanding fiber operator.</a:t>
+              <a:t>From ~EBITDA break-even today to positive, scaling EBITDA. GAAP net income is grant-supported early and pressured later by non-cash depreciation on the growing $50M plant — EBITDA is the operating-health metric. Build capital + ~$0.46M/yr interest are funded by the capital program and grant reimbursement (~$1.5–2.5M/yr).</a:t>
             </a:r>
           </a:p>
         </p:txBody>
